--- a/cursos/recursos/desequilibrios-de-material/17-dama-contra-piezas-cuando-gana-la-dama.pptx
+++ b/cursos/recursos/desequilibrios-de-material/17-dama-contra-piezas-cuando-gana-la-dama.pptx
@@ -3483,7 +3483,7 @@
                 </a:solidFill>
                 <a:latin typeface="Calibri"/>
               </a:rPr>
-              <a:t>Pista: Pensá en avanzar un peón del flanco de rey dos casillas, atacando al peón h negro.</a:t>
+              <a:t>Pista: Piensa en avanzar un peón del flanco de rey dos casillas, atacando al peón h negro.</a:t>
             </a:r>
           </a:p>
         </p:txBody>
@@ -3806,7 +3806,7 @@
                 </a:solidFill>
                 <a:latin typeface="Calibri"/>
               </a:rPr>
-              <a:t>Pista: Pensá en un salto de caballo hacia el centro que amenace capturar a una pieza negra bien protegida.</a:t>
+              <a:t>Pista: Piensa en un salto de caballo hacia el centro que amenace capturar a una pieza negra bien protegida.</a:t>
             </a:r>
           </a:p>
         </p:txBody>
@@ -4129,7 +4129,7 @@
                 </a:solidFill>
                 <a:latin typeface="Calibri"/>
               </a:rPr>
-              <a:t>Pista: Pensá en una jugada de dama que prepare el avance del peón e y controle a la vez la casilla de coronación.</a:t>
+              <a:t>Pista: Piensa en una jugada de dama que prepare el avance del peón e y controle a la vez la casilla de coronación.</a:t>
             </a:r>
           </a:p>
         </p:txBody>
@@ -4452,7 +4452,7 @@
                 </a:solidFill>
                 <a:latin typeface="Calibri"/>
               </a:rPr>
-              <a:t>Pista: Pensá en avanzar el propio rey hacia el centro del tablero, algo posible porque el rival no tiene piezas para atacarlo.</a:t>
+              <a:t>Pista: Piensa en avanzar el propio rey hacia el centro del tablero, algo posible porque el rival no tiene piezas para atacarlo.</a:t>
             </a:r>
           </a:p>
         </p:txBody>
@@ -5307,7 +5307,7 @@
                 </a:solidFill>
                 <a:latin typeface="Calibri"/>
               </a:rPr>
-              <a:t>Pista: Pensá en una jugada de dama que ataque directamente al peón h7 desde una casilla activa.</a:t>
+              <a:t>Pista: Piensa en una jugada de dama que ataque directamente al peón h7 desde una casilla activa.</a:t>
             </a:r>
           </a:p>
         </p:txBody>
@@ -5630,7 +5630,7 @@
                 </a:solidFill>
                 <a:latin typeface="Calibri"/>
               </a:rPr>
-              <a:t>Pista: Pensá en un jaque de dama hacia el centro del tablero que obligue al rey negro a retroceder o desviarse.</a:t>
+              <a:t>Pista: Piensa en un jaque de dama hacia el centro del tablero que obligue al rey negro a retroceder o desviarse.</a:t>
             </a:r>
           </a:p>
         </p:txBody>
@@ -5953,7 +5953,7 @@
                 </a:solidFill>
                 <a:latin typeface="Calibri"/>
               </a:rPr>
-              <a:t>Pista: Pensá en colocar la dama en la esquina del tablero, sobre la gran diagonal larga.</a:t>
+              <a:t>Pista: Piensa en colocar la dama en la esquina del tablero, sobre la gran diagonal larga.</a:t>
             </a:r>
           </a:p>
         </p:txBody>
@@ -6451,7 +6451,7 @@
                 </a:solidFill>
                 <a:latin typeface="Calibri"/>
               </a:rPr>
-              <a:t>Pista: Pensá en una nueva ruta de jaque por la diagonal larga que pasa por b7.</a:t>
+              <a:t>Pista: Piensa en una nueva ruta de jaque por la diagonal larga que pasa por b7.</a:t>
             </a:r>
           </a:p>
         </p:txBody>
@@ -6774,7 +6774,7 @@
                 </a:solidFill>
                 <a:latin typeface="Calibri"/>
               </a:rPr>
-              <a:t>Pista: Pensá en un jaque de dama desde una casilla cercana al rey blanco que corte cualquier jugada de espera negra.</a:t>
+              <a:t>Pista: Piensa en un jaque de dama desde una casilla cercana al rey blanco que corte cualquier jugada de espera negra.</a:t>
             </a:r>
           </a:p>
         </p:txBody>
@@ -7629,7 +7629,7 @@
                 </a:solidFill>
                 <a:latin typeface="Calibri"/>
               </a:rPr>
-              <a:t>Pista: Pensá en capturar con el caballo un peón blanco recién avanzado, aceptando quedar una pieza abajo pero con una posición sólida.</a:t>
+              <a:t>Pista: Piensa en capturar con el caballo un peón blanco recién avanzado, aceptando quedar una pieza abajo pero con una posición sólida.</a:t>
             </a:r>
           </a:p>
         </p:txBody>
@@ -7952,7 +7952,7 @@
                 </a:solidFill>
                 <a:latin typeface="Calibri"/>
               </a:rPr>
-              <a:t>Pista: Pensá en otra captura de alfil, esta vez sobre el peón de torre blanco.</a:t>
+              <a:t>Pista: Piensa en otra captura de alfil, esta vez sobre el peón de torre blanco.</a:t>
             </a:r>
           </a:p>
         </p:txBody>
@@ -8275,7 +8275,7 @@
                 </a:solidFill>
                 <a:latin typeface="Calibri"/>
               </a:rPr>
-              <a:t>Pista: Pensá en un salto de caballo que despeje el camino de los peones negros bloqueados.</a:t>
+              <a:t>Pista: Piensa en un salto de caballo que despeje el camino de los peones negros bloqueados.</a:t>
             </a:r>
           </a:p>
         </p:txBody>
@@ -8598,7 +8598,7 @@
                 </a:solidFill>
                 <a:latin typeface="Calibri"/>
               </a:rPr>
-              <a:t>Pista: Pensá en entregar el peón más avanzado del flanco de dama para que los demás puedan avanzar libremente.</a:t>
+              <a:t>Pista: Piensa en entregar el peón más avanzado del flanco de dama para que los demás puedan avanzar libremente.</a:t>
             </a:r>
           </a:p>
         </p:txBody>
@@ -9153,7 +9153,7 @@
                 </a:solidFill>
                 <a:latin typeface="Calibri"/>
               </a:rPr>
-              <a:t>Jugá contra el motor la posición de Grigoryan–Petrosian con el bando de la dama, buscando activamente abrir el juego para maximizar tus chances de generar amenazas rápidas. Después estudiá Brown–Flores Rios e identificá en qué jugadas concretas se aplican cada uno de los cinco principios de supervivencia.</a:t>
+              <a:t>Juega contra el motor la posición de Grigoryan–Petrosian con el bando de la dama, buscando activamente abrir el juego para maximizar tus chances de generar amenazas rápidas. Después estudia Brown–Flores Rios e identifica en qué jugadas concretas se aplican cada uno de los cinco principios de supervivencia.</a:t>
             </a:r>
           </a:p>
           <a:p>
@@ -9185,7 +9185,7 @@
                 </a:solidFill>
                 <a:latin typeface="Calibri"/>
               </a:rPr>
-              <a:t>En la página del curso podés recorrer cada partida con los comentarios, adivinar las jugadas clave en el tablero y continuar cualquier posición contra el motor (Stockfish). La hoja de ejercicios en PDF reúne los momentos clave de esta lección para resolver sin tablero.</a:t>
+              <a:t>En la página del curso puedes recorrer cada partida con los comentarios, adivinar las jugadas clave en el tablero y continuar cualquier posición contra el motor (Stockfish). La hoja de ejercicios en PDF reúne los momentos clave de esta lección para resolver sin tablero.</a:t>
             </a:r>
           </a:p>
         </p:txBody>
@@ -9224,7 +9224,7 @@
                 </a:solidFill>
                 <a:latin typeface="Calibri"/>
               </a:rPr>
-              <a:t>•  Primero recorré la partida completa leyendo los comentarios.</a:t>
+              <a:t>•  Primero recorre la partida completa leyendo los comentarios.</a:t>
             </a:r>
           </a:p>
           <a:p>
@@ -9240,7 +9240,7 @@
                 </a:solidFill>
                 <a:latin typeface="Calibri"/>
               </a:rPr>
-              <a:t>•  Después hacé el modo "adivinar las jugadas clave" hasta acertar todas.</a:t>
+              <a:t>•  Después haz el modo "adivinar las jugadas clave" hasta acertar todas.</a:t>
             </a:r>
           </a:p>
           <a:p>
@@ -9256,7 +9256,7 @@
                 </a:solidFill>
                 <a:latin typeface="Calibri"/>
               </a:rPr>
-              <a:t>•  Por último respondé el cuestionario y anotá con tus palabras las reglas de la lección.</a:t>
+              <a:t>•  Por último responde el cuestionario y anota con tus palabras las reglas de la lección.</a:t>
             </a:r>
           </a:p>
         </p:txBody>
@@ -9717,7 +9717,7 @@
                 </a:solidFill>
                 <a:latin typeface="Calibri"/>
               </a:rPr>
-              <a:t>•  Con la dama, buscá activamente abrir el juego, incluso a costa de material adicional.</a:t>
+              <a:t>•  Con la dama, busca activamente abrir el juego, incluso a costa de material adicional.</a:t>
             </a:r>
           </a:p>
           <a:p>
@@ -9733,7 +9733,7 @@
                 </a:solidFill>
                 <a:latin typeface="Calibri"/>
               </a:rPr>
-              <a:t>•  Con las piezas menores, aplicá el modo supervivencia: estabilidad, un solo flanco, cautela con los cambios.</a:t>
+              <a:t>•  Con las piezas menores, aplica el modo supervivencia: estabilidad, un solo flanco, cautela con los cambios.</a:t>
             </a:r>
           </a:p>
           <a:p>
@@ -9765,7 +9765,7 @@
                 </a:solidFill>
                 <a:latin typeface="Calibri"/>
               </a:rPr>
-              <a:t>•  Si jugás con la dama, evitá la pasividad: tu fuerza depende de la velocidad y la apertura del juego.</a:t>
+              <a:t>•  Si juegas con la dama, evita la pasividad: tu fuerza depende de la velocidad y la apertura del juego.</a:t>
             </a:r>
           </a:p>
         </p:txBody>
@@ -10367,7 +10367,7 @@
                 </a:solidFill>
                 <a:latin typeface="Calibri"/>
               </a:rPr>
-              <a:t>Pista: Pensá en trasladar la dama hacia el otro flanco, buscando acercarse al rey rival.</a:t>
+              <a:t>Pista: Piensa en trasladar la dama hacia el otro flanco, buscando acercarse al rey rival.</a:t>
             </a:r>
           </a:p>
         </p:txBody>
